--- a/metro/metro-f12-coming-soon.pptx
+++ b/metro/metro-f12-coming-soon.pptx
@@ -3514,9 +3514,9 @@
                 <a:solidFill>
                   <a:srgbClr val="FFFFFF"/>
                 </a:solidFill>
-                <a:latin typeface="Space Grotesk"/>
-                <a:ea typeface="Space Grotesk"/>
-                <a:cs typeface="Space Grotesk"/>
+                <a:latin typeface="HK Grotesk"/>
+                <a:ea typeface="HK Grotesk"/>
+                <a:cs typeface="HK Grotesk"/>
               </a:rPr>
               <a:t>NO</a:t>
             </a:r>
@@ -3553,9 +3553,9 @@
                 <a:solidFill>
                   <a:srgbClr val="FFFFFF"/>
                 </a:solidFill>
-                <a:latin typeface="Space Grotesk"/>
-                <a:ea typeface="Space Grotesk"/>
-                <a:cs typeface="Space Grotesk"/>
+                <a:latin typeface="HK Grotesk"/>
+                <a:ea typeface="HK Grotesk"/>
+                <a:cs typeface="HK Grotesk"/>
               </a:rPr>
               <a:t>North &amp; Oak</a:t>
             </a:r>
@@ -3697,9 +3697,9 @@
                 <a:solidFill>
                   <a:srgbClr val="FFFFFF"/>
                 </a:solidFill>
-                <a:latin typeface="Space Grotesk"/>
-                <a:ea typeface="Space Grotesk"/>
-                <a:cs typeface="Space Grotesk"/>
+                <a:latin typeface="HK Grotesk"/>
+                <a:ea typeface="HK Grotesk"/>
+                <a:cs typeface="HK Grotesk"/>
               </a:rPr>
               <a:t>Something</a:t>
             </a:r>
@@ -3715,9 +3715,9 @@
                 <a:solidFill>
                   <a:srgbClr val="FFFFFF"/>
                 </a:solidFill>
-                <a:latin typeface="Space Grotesk"/>
-                <a:ea typeface="Space Grotesk"/>
-                <a:cs typeface="Space Grotesk"/>
+                <a:latin typeface="HK Grotesk"/>
+                <a:ea typeface="HK Grotesk"/>
+                <a:cs typeface="HK Grotesk"/>
               </a:rPr>
               <a:t>special</a:t>
             </a:r>
@@ -3733,9 +3733,9 @@
                 <a:solidFill>
                   <a:srgbClr val="FFFFFF"/>
                 </a:solidFill>
-                <a:latin typeface="Space Grotesk"/>
-                <a:ea typeface="Space Grotesk"/>
-                <a:cs typeface="Space Grotesk"/>
+                <a:latin typeface="HK Grotesk"/>
+                <a:ea typeface="HK Grotesk"/>
+                <a:cs typeface="HK Grotesk"/>
               </a:rPr>
               <a:t>is on the way.</a:t>
             </a:r>
@@ -3803,9 +3803,9 @@
                 <a:solidFill>
                   <a:srgbClr val="FFFFFF"/>
                 </a:solidFill>
-                <a:latin typeface="Space Grotesk"/>
-                <a:ea typeface="Space Grotesk"/>
-                <a:cs typeface="Space Grotesk"/>
+                <a:latin typeface="HK Grotesk"/>
+                <a:ea typeface="HK Grotesk"/>
+                <a:cs typeface="HK Grotesk"/>
               </a:rPr>
               <a:t>June 21</a:t>
             </a:r>
@@ -3873,9 +3873,9 @@
                 <a:solidFill>
                   <a:srgbClr val="FFFFFF"/>
                 </a:solidFill>
-                <a:latin typeface="Space Grotesk"/>
-                <a:ea typeface="Space Grotesk"/>
-                <a:cs typeface="Space Grotesk"/>
+                <a:latin typeface="HK Grotesk"/>
+                <a:ea typeface="HK Grotesk"/>
+                <a:cs typeface="HK Grotesk"/>
               </a:rPr>
               <a:t>Fulton Market</a:t>
             </a:r>
@@ -3943,9 +3943,9 @@
                 <a:solidFill>
                   <a:srgbClr val="FFFFFF"/>
                 </a:solidFill>
-                <a:latin typeface="Space Grotesk"/>
-                <a:ea typeface="Space Grotesk"/>
-                <a:cs typeface="Space Grotesk"/>
+                <a:latin typeface="HK Grotesk"/>
+                <a:ea typeface="HK Grotesk"/>
+                <a:cs typeface="HK Grotesk"/>
               </a:rPr>
               <a:t>$895K</a:t>
             </a:r>
